--- a/docs/LifeLine_Presentation.pptx
+++ b/docs/LifeLine_Presentation.pptx
@@ -3873,7 +3873,7 @@
                   <a:srgbClr val="8E9AA8"/>
                 </a:solidFill>
               </a:rPr>
-              <a:t>      –  every algorithm cross-verified against networkx on the real city graph</a:t>
+              <a:t>      –  every algorithm cross-verified against an independent Python implementation on the real city graph</a:t>
             </a:r>
           </a:p>
           <a:p>
@@ -5018,7 +5018,7 @@
                   <a:srgbClr val="E8ECF1"/>
                 </a:solidFill>
               </a:rPr>
-              <a:t>▪  28 locations, 48 roads → weighted undirected graph</a:t>
+              <a:t>▪  40 locations, 83 roads → weighted undirected graph</a:t>
             </a:r>
           </a:p>
           <a:p>
